--- a/demo/pptx/powerpoint_sample.pptx
+++ b/demo/pptx/powerpoint_sample.pptx
@@ -5200,7 +5200,55 @@
               <a:rPr lang="zh-CN" altLang="en-US"/>
               <a:t>普通文本框</a:t>
             </a:r>
-            <a:endParaRPr lang="zh-CN" altLang="en-US"/>
+            <a:r>
+              <a:rPr lang="en-US" altLang="zh-CN"/>
+              <a:t> </a:t>
+            </a:r>
+            <a:r>
+              <a:rPr lang="zh-CN" altLang="en-US" b="1">
+                <a:ea typeface="宋体" charset="0"/>
+              </a:rPr>
+              <a:t>粗体</a:t>
+            </a:r>
+            <a:r>
+              <a:rPr lang="en-US" altLang="zh-CN" b="1">
+                <a:ea typeface="宋体" charset="0"/>
+              </a:rPr>
+              <a:t> </a:t>
+            </a:r>
+            <a:r>
+              <a:rPr lang="zh-CN" altLang="en-US" i="1">
+                <a:ea typeface="宋体" charset="0"/>
+              </a:rPr>
+              <a:t>斜体</a:t>
+            </a:r>
+            <a:r>
+              <a:rPr lang="en-US" altLang="zh-CN" i="1">
+                <a:ea typeface="宋体" charset="0"/>
+              </a:rPr>
+              <a:t> </a:t>
+            </a:r>
+            <a:r>
+              <a:rPr lang="zh-CN" altLang="en-US" u="sng">
+                <a:ea typeface="宋体" charset="0"/>
+              </a:rPr>
+              <a:t>下划线</a:t>
+            </a:r>
+            <a:r>
+              <a:rPr lang="en-US" altLang="zh-CN">
+                <a:ea typeface="宋体" charset="0"/>
+              </a:rPr>
+              <a:t> </a:t>
+            </a:r>
+            <a:r>
+              <a:rPr lang="zh-CN" altLang="en-US" strike="sngStrike">
+                <a:ea typeface="宋体" charset="0"/>
+              </a:rPr>
+              <a:t>删除线</a:t>
+            </a:r>
+            <a:endParaRPr lang="zh-CN" altLang="en-US" strike="sngStrike">
+              <a:ea typeface="宋体" charset="0"/>
+            </a:endParaRPr>
           </a:p>
         </p:txBody>
       </p:sp>
